--- a/metacountregressor/scripts/washington_cmf_presentation.pptx
+++ b/metacountregressor/scripts/washington_cmf_presentation.pptx
@@ -3521,7 +3521,7 @@
                       </a:pPr>
                       <a:r>
                         <a:rPr/>
-                        <a:t>1582.95</a:t>
+                        <a:t>1582.34</a:t>
                       </a:r>
                     </a:p>
                   </a:txBody>
@@ -3536,7 +3536,7 @@
                       </a:pPr>
                       <a:r>
                         <a:rPr/>
-                        <a:t>1562.58</a:t>
+                        <a:t>1555.2</a:t>
                       </a:r>
                     </a:p>
                   </a:txBody>
@@ -3551,7 +3551,7 @@
                       </a:pPr>
                       <a:r>
                         <a:rPr/>
-                        <a:t>13.9994</a:t>
+                        <a:t>16.1772</a:t>
                       </a:r>
                     </a:p>
                   </a:txBody>
@@ -3566,7 +3566,7 @@
                       </a:pPr>
                       <a:r>
                         <a:rPr/>
-                        <a:t>299.84</a:t>
+                        <a:t>349.87</a:t>
                       </a:r>
                     </a:p>
                   </a:txBody>
@@ -3581,7 +3581,7 @@
                       </a:pPr>
                       <a:r>
                         <a:rPr/>
-                        <a:t>0.5551</a:t>
+                        <a:t>0.406</a:t>
                       </a:r>
                     </a:p>
                   </a:txBody>
@@ -7086,10 +7086,10 @@
                 <a:tableStyleId>{5C22544A-7EE6-4342-B048-85BDC9FD1C3A}</a:tableStyleId>
               </a:tblPr>
               <a:tblGrid>
-                <a:gridCol w="673100"/>
-                <a:gridCol w="3149600"/>
-                <a:gridCol w="825500"/>
-                <a:gridCol w="444500"/>
+                <a:gridCol w="406400"/>
+                <a:gridCol w="3937000"/>
+                <a:gridCol w="495300"/>
+                <a:gridCol w="266700"/>
               </a:tblGrid>
               <a:tr h="0">
                 <a:tc>
@@ -7198,7 +7198,7 @@
                       </a:pPr>
                       <a:r>
                         <a:rPr/>
-                        <a:t>-7.5755</a:t>
+                        <a:t>-6.6152</a:t>
                       </a:r>
                     </a:p>
                   </a:txBody>
@@ -7254,7 +7254,7 @@
                       </a:pPr>
                       <a:r>
                         <a:rPr/>
-                        <a:t>+0.9385</a:t>
+                        <a:t>+0.8427</a:t>
                       </a:r>
                     </a:p>
                   </a:txBody>
@@ -7280,7 +7280,7 @@
                       </a:pPr>
                       <a:r>
                         <a:rPr/>
-                        <a:t>LANES</a:t>
+                        <a:t>DOUBLE</a:t>
                       </a:r>
                     </a:p>
                   </a:txBody>
@@ -7295,7 +7295,7 @@
                       </a:pPr>
                       <a:r>
                         <a:rPr/>
-                        <a:t>Total Lane Count — both directions (lanes)</a:t>
+                        <a:t>Double-Unit Trucks (%)</a:t>
                       </a:r>
                     </a:p>
                   </a:txBody>
@@ -7310,7 +7310,7 @@
                       </a:pPr>
                       <a:r>
                         <a:rPr/>
-                        <a:t>-0.0103</a:t>
+                        <a:t>-0.2002</a:t>
                       </a:r>
                     </a:p>
                   </a:txBody>
@@ -7325,7 +7325,7 @@
                       </a:pPr>
                       <a:r>
                         <a:rPr/>
-                        <a:t>0.9912</a:t>
+                        <a:t>0.9576</a:t>
                       </a:r>
                     </a:p>
                   </a:txBody>
@@ -7342,7 +7342,7 @@
                       </a:pPr>
                       <a:r>
                         <a:rPr/>
-                        <a:t>WIDTH</a:t>
+                        <a:t>MEDWIDTH</a:t>
                       </a:r>
                     </a:p>
                   </a:txBody>
@@ -7357,7 +7357,7 @@
                       </a:pPr>
                       <a:r>
                         <a:rPr/>
-                        <a:t>Pavement Width (ft)</a:t>
+                        <a:t>Median Width (ft)</a:t>
                       </a:r>
                     </a:p>
                   </a:txBody>
@@ -7372,7 +7372,7 @@
                       </a:pPr>
                       <a:r>
                         <a:rPr/>
-                        <a:t>-0.1431</a:t>
+                        <a:t>+0.0564</a:t>
                       </a:r>
                     </a:p>
                   </a:txBody>
@@ -7387,7 +7387,131 @@
                       </a:pPr>
                       <a:r>
                         <a:rPr/>
-                        <a:t>0.9912</a:t>
+                        <a:t>1.0406</a:t>
+                      </a:r>
+                    </a:p>
+                  </a:txBody>
+                </a:tc>
+              </a:tr>
+              <a:tr h="0">
+                <a:tc>
+                  <a:txBody>
+                    <a:bodyPr/>
+                    <a:lstStyle/>
+                    <a:p>
+                      <a:pPr lvl="0" indent="0" marL="0">
+                        <a:buNone/>
+                      </a:pPr>
+                      <a:r>
+                        <a:rPr/>
+                        <a:t>MIMEDSH</a:t>
+                      </a:r>
+                    </a:p>
+                  </a:txBody>
+                </a:tc>
+                <a:tc>
+                  <a:txBody>
+                    <a:bodyPr/>
+                    <a:lstStyle/>
+                    <a:p>
+                      <a:pPr lvl="0" indent="0" marL="0">
+                        <a:buNone/>
+                      </a:pPr>
+                      <a:r>
+                        <a:rPr/>
+                        <a:t>Minimum Median/Shoulder Width (ft)</a:t>
+                      </a:r>
+                    </a:p>
+                  </a:txBody>
+                </a:tc>
+                <a:tc>
+                  <a:txBody>
+                    <a:bodyPr/>
+                    <a:lstStyle/>
+                    <a:p>
+                      <a:pPr lvl="0" indent="0" marL="0">
+                        <a:buNone/>
+                      </a:pPr>
+                      <a:r>
+                        <a:rPr/>
+                        <a:t>-0.1339</a:t>
+                      </a:r>
+                    </a:p>
+                  </a:txBody>
+                </a:tc>
+                <a:tc>
+                  <a:txBody>
+                    <a:bodyPr/>
+                    <a:lstStyle/>
+                    <a:p>
+                      <a:pPr lvl="0" indent="0" marL="0">
+                        <a:buNone/>
+                      </a:pPr>
+                      <a:r>
+                        <a:rPr/>
+                        <a:t>0.9196</a:t>
+                      </a:r>
+                    </a:p>
+                  </a:txBody>
+                </a:tc>
+              </a:tr>
+              <a:tr h="0">
+                <a:tc>
+                  <a:txBody>
+                    <a:bodyPr/>
+                    <a:lstStyle/>
+                    <a:p>
+                      <a:pPr lvl="0" indent="0" marL="0">
+                        <a:buNone/>
+                      </a:pPr>
+                      <a:r>
+                        <a:rPr/>
+                        <a:t>MXGRDIFF</a:t>
+                      </a:r>
+                    </a:p>
+                  </a:txBody>
+                </a:tc>
+                <a:tc>
+                  <a:txBody>
+                    <a:bodyPr/>
+                    <a:lstStyle/>
+                    <a:p>
+                      <a:pPr lvl="0" indent="0" marL="0">
+                        <a:buNone/>
+                      </a:pPr>
+                      <a:r>
+                        <a:rPr/>
+                        <a:t>Max-Min Grade Difference (%) — difference between steepest and flattest grade on segment</a:t>
+                      </a:r>
+                    </a:p>
+                  </a:txBody>
+                </a:tc>
+                <a:tc>
+                  <a:txBody>
+                    <a:bodyPr/>
+                    <a:lstStyle/>
+                    <a:p>
+                      <a:pPr lvl="0" indent="0" marL="0">
+                        <a:buNone/>
+                      </a:pPr>
+                      <a:r>
+                        <a:rPr/>
+                        <a:t>+0.0808</a:t>
+                      </a:r>
+                    </a:p>
+                  </a:txBody>
+                </a:tc>
+                <a:tc>
+                  <a:txBody>
+                    <a:bodyPr/>
+                    <a:lstStyle/>
+                    <a:p>
+                      <a:pPr lvl="0" indent="0" marL="0">
+                        <a:buNone/>
+                      </a:pPr>
+                      <a:r>
+                        <a:rPr/>
+                        <a:t>1.0414</a:t>
                       </a:r>
                     </a:p>
                   </a:txBody>
@@ -7610,7 +7734,7 @@
                       </a:pPr>
                       <a:r>
                         <a:rPr/>
-                        <a:t>SPEED</a:t>
+                        <a:t>AVEPRE</a:t>
                       </a:r>
                     </a:p>
                   </a:txBody>
@@ -7625,7 +7749,7 @@
                       </a:pPr>
                       <a:r>
                         <a:rPr/>
-                        <a:t>Posted Speed Limit (mph)</a:t>
+                        <a:t>Average Annual Precipitation (in/yr)</a:t>
                       </a:r>
                     </a:p>
                   </a:txBody>
@@ -7640,7 +7764,7 @@
                       </a:pPr>
                       <a:r>
                         <a:rPr/>
-                        <a:t>-0.0146</a:t>
+                        <a:t>+0.0059</a:t>
                       </a:r>
                     </a:p>
                   </a:txBody>
